--- a/Apresentação.pptx
+++ b/Apresentação.pptx
@@ -12174,89 +12174,6 @@
           </a:p>
         </p:txBody>
       </p:sp>
-      <p:sp>
-        <p:nvSpPr>
-          <p:cNvPr id="3" name="Retângulo 2">
-            <a:extLst>
-              <a:ext uri="{FF2B5EF4-FFF2-40B4-BE49-F238E27FC236}">
-                <a16:creationId xmlns:a16="http://schemas.microsoft.com/office/drawing/2014/main" id="{AF643C7B-D95D-69EF-9D1C-5D15A9DDD513}"/>
-              </a:ext>
-            </a:extLst>
-          </p:cNvPr>
-          <p:cNvSpPr/>
-          <p:nvPr/>
-        </p:nvSpPr>
-        <p:spPr>
-          <a:xfrm>
-            <a:off x="5145422" y="1134380"/>
-            <a:ext cx="3251200" cy="1428480"/>
-          </a:xfrm>
-          <a:prstGeom prst="rect">
-            <a:avLst/>
-          </a:prstGeom>
-          <a:noFill/>
-          <a:ln w="0">
-            <a:noFill/>
-          </a:ln>
-        </p:spPr>
-        <p:style>
-          <a:lnRef idx="0">
-            <a:scrgbClr r="0" g="0" b="0"/>
-          </a:lnRef>
-          <a:fillRef idx="0">
-            <a:scrgbClr r="0" g="0" b="0"/>
-          </a:fillRef>
-          <a:effectRef idx="0">
-            <a:scrgbClr r="0" g="0" b="0"/>
-          </a:effectRef>
-          <a:fontRef idx="minor"/>
-        </p:style>
-        <p:txBody>
-          <a:bodyPr anchor="ctr">
-            <a:normAutofit/>
-          </a:bodyPr>
-          <a:lstStyle/>
-          <a:p>
-            <a:pPr defTabSz="914400">
-              <a:lnSpc>
-                <a:spcPct val="100000"/>
-              </a:lnSpc>
-              <a:tabLst>
-                <a:tab pos="0" algn="l"/>
-              </a:tabLst>
-            </a:pPr>
-            <a:r>
-              <a:rPr lang="en-US" sz="2400" b="0" u="none" strike="noStrike" dirty="0">
-                <a:effectLst/>
-                <a:uFillTx/>
-                <a:latin typeface="Bebas Neue"/>
-              </a:rPr>
-              <a:t>Test-time augmentation (</a:t>
-            </a:r>
-            <a:r>
-              <a:rPr lang="en-US" sz="2400" b="0" u="none" strike="noStrike" dirty="0" err="1">
-                <a:effectLst/>
-                <a:uFillTx/>
-                <a:latin typeface="Bebas Neue"/>
-              </a:rPr>
-              <a:t>tta</a:t>
-            </a:r>
-            <a:r>
-              <a:rPr lang="en-US" sz="2400" b="0" u="none" strike="noStrike" dirty="0">
-                <a:effectLst/>
-                <a:uFillTx/>
-                <a:latin typeface="Bebas Neue"/>
-              </a:rPr>
-              <a:t>)</a:t>
-            </a:r>
-            <a:endParaRPr lang="en-US" sz="2400" b="0" u="none" strike="noStrike" dirty="0">
-              <a:effectLst/>
-              <a:uFillTx/>
-              <a:latin typeface="OpenSymbol"/>
-            </a:endParaRPr>
-          </a:p>
-        </p:txBody>
-      </p:sp>
       <p:cxnSp>
         <p:nvCxnSpPr>
           <p:cNvPr id="4" name="Google Shape;429;p39">
@@ -12303,7 +12220,7 @@
         </p:nvSpPr>
         <p:spPr>
           <a:xfrm>
-            <a:off x="747378" y="2029558"/>
+            <a:off x="842206" y="1994703"/>
             <a:ext cx="3462120" cy="3028680"/>
           </a:xfrm>
           <a:prstGeom prst="rect">
@@ -12347,274 +12264,13 @@
               </a:tabLst>
             </a:pPr>
             <a:r>
-              <a:rPr lang="en-US" sz="1400" dirty="0" err="1">
+              <a:rPr lang="pt-BR" sz="1400" dirty="0">
                 <a:solidFill>
                   <a:schemeClr val="dk1"/>
                 </a:solidFill>
                 <a:latin typeface="Raleway Medium"/>
               </a:rPr>
-              <a:t>Média</a:t>
-            </a:r>
-            <a:r>
-              <a:rPr lang="en-US" sz="1400" dirty="0">
-                <a:solidFill>
-                  <a:schemeClr val="dk1"/>
-                </a:solidFill>
-                <a:latin typeface="Raleway Medium"/>
-              </a:rPr>
-              <a:t> com SoftMax das </a:t>
-            </a:r>
-            <a:r>
-              <a:rPr lang="en-US" sz="1400" dirty="0" err="1">
-                <a:solidFill>
-                  <a:schemeClr val="dk1"/>
-                </a:solidFill>
-                <a:latin typeface="Raleway Medium"/>
-              </a:rPr>
-              <a:t>inferências</a:t>
-            </a:r>
-            <a:r>
-              <a:rPr lang="en-US" sz="1400" dirty="0">
-                <a:solidFill>
-                  <a:schemeClr val="dk1"/>
-                </a:solidFill>
-                <a:latin typeface="Raleway Medium"/>
-              </a:rPr>
-              <a:t> de ambos </a:t>
-            </a:r>
-            <a:r>
-              <a:rPr lang="en-US" sz="1400" dirty="0" err="1">
-                <a:solidFill>
-                  <a:schemeClr val="dk1"/>
-                </a:solidFill>
-                <a:latin typeface="Raleway Medium"/>
-              </a:rPr>
-              <a:t>os</a:t>
-            </a:r>
-            <a:r>
-              <a:rPr lang="en-US" sz="1400" dirty="0">
-                <a:solidFill>
-                  <a:schemeClr val="dk1"/>
-                </a:solidFill>
-                <a:latin typeface="Raleway Medium"/>
-              </a:rPr>
-              <a:t> </a:t>
-            </a:r>
-            <a:r>
-              <a:rPr lang="en-US" sz="1400" dirty="0" err="1">
-                <a:solidFill>
-                  <a:schemeClr val="dk1"/>
-                </a:solidFill>
-                <a:latin typeface="Raleway Medium"/>
-              </a:rPr>
-              <a:t>modelos</a:t>
-            </a:r>
-            <a:r>
-              <a:rPr lang="en-US" sz="1400" dirty="0">
-                <a:solidFill>
-                  <a:schemeClr val="dk1"/>
-                </a:solidFill>
-                <a:latin typeface="Raleway Medium"/>
-              </a:rPr>
-              <a:t>. Foi </a:t>
-            </a:r>
-            <a:r>
-              <a:rPr lang="en-US" sz="1400" dirty="0" err="1">
-                <a:solidFill>
-                  <a:schemeClr val="dk1"/>
-                </a:solidFill>
-                <a:latin typeface="Raleway Medium"/>
-              </a:rPr>
-              <a:t>utilizado</a:t>
-            </a:r>
-            <a:r>
-              <a:rPr lang="en-US" sz="1400" dirty="0">
-                <a:solidFill>
-                  <a:schemeClr val="dk1"/>
-                </a:solidFill>
-                <a:latin typeface="Raleway Medium"/>
-              </a:rPr>
-              <a:t> o </a:t>
-            </a:r>
-            <a:r>
-              <a:rPr lang="en-US" sz="1400" dirty="0" err="1">
-                <a:solidFill>
-                  <a:schemeClr val="dk1"/>
-                </a:solidFill>
-                <a:latin typeface="Raleway Medium"/>
-              </a:rPr>
-              <a:t>softmax</a:t>
-            </a:r>
-            <a:r>
-              <a:rPr lang="en-US" sz="1400" dirty="0">
-                <a:solidFill>
-                  <a:schemeClr val="dk1"/>
-                </a:solidFill>
-                <a:latin typeface="Raleway Medium"/>
-              </a:rPr>
-              <a:t> para </a:t>
-            </a:r>
-            <a:r>
-              <a:rPr lang="en-US" sz="1400" dirty="0" err="1">
-                <a:solidFill>
-                  <a:schemeClr val="dk1"/>
-                </a:solidFill>
-                <a:latin typeface="Raleway Medium"/>
-              </a:rPr>
-              <a:t>equiparam</a:t>
-            </a:r>
-            <a:r>
-              <a:rPr lang="en-US" sz="1400" dirty="0">
-                <a:solidFill>
-                  <a:schemeClr val="dk1"/>
-                </a:solidFill>
-                <a:latin typeface="Raleway Medium"/>
-              </a:rPr>
-              <a:t> ambas </a:t>
-            </a:r>
-            <a:r>
-              <a:rPr lang="en-US" sz="1400" dirty="0" err="1">
-                <a:solidFill>
-                  <a:schemeClr val="dk1"/>
-                </a:solidFill>
-                <a:latin typeface="Raleway Medium"/>
-              </a:rPr>
-              <a:t>inferências</a:t>
-            </a:r>
-            <a:r>
-              <a:rPr lang="en-US" sz="1400" dirty="0">
-                <a:solidFill>
-                  <a:schemeClr val="dk1"/>
-                </a:solidFill>
-                <a:latin typeface="Raleway Medium"/>
-              </a:rPr>
-              <a:t> e </a:t>
-            </a:r>
-            <a:r>
-              <a:rPr lang="en-US" sz="1400" dirty="0" err="1">
-                <a:solidFill>
-                  <a:schemeClr val="dk1"/>
-                </a:solidFill>
-                <a:latin typeface="Raleway Medium"/>
-              </a:rPr>
-              <a:t>os</a:t>
-            </a:r>
-            <a:r>
-              <a:rPr lang="en-US" sz="1400" dirty="0">
-                <a:solidFill>
-                  <a:schemeClr val="dk1"/>
-                </a:solidFill>
-                <a:latin typeface="Raleway Medium"/>
-              </a:rPr>
-              <a:t> </a:t>
-            </a:r>
-            <a:r>
-              <a:rPr lang="en-US" sz="1400" dirty="0" err="1">
-                <a:solidFill>
-                  <a:schemeClr val="dk1"/>
-                </a:solidFill>
-                <a:latin typeface="Raleway Medium"/>
-              </a:rPr>
-              <a:t>dois</a:t>
-            </a:r>
-            <a:r>
-              <a:rPr lang="en-US" sz="1400" dirty="0">
-                <a:solidFill>
-                  <a:schemeClr val="dk1"/>
-                </a:solidFill>
-                <a:latin typeface="Raleway Medium"/>
-              </a:rPr>
-              <a:t> </a:t>
-            </a:r>
-            <a:r>
-              <a:rPr lang="en-US" sz="1400" dirty="0" err="1">
-                <a:solidFill>
-                  <a:schemeClr val="dk1"/>
-                </a:solidFill>
-                <a:latin typeface="Raleway Medium"/>
-              </a:rPr>
-              <a:t>modelos</a:t>
-            </a:r>
-            <a:r>
-              <a:rPr lang="en-US" sz="1400" dirty="0">
-                <a:solidFill>
-                  <a:schemeClr val="dk1"/>
-                </a:solidFill>
-                <a:latin typeface="Raleway Medium"/>
-              </a:rPr>
-              <a:t> </a:t>
-            </a:r>
-            <a:r>
-              <a:rPr lang="en-US" sz="1400" dirty="0" err="1">
-                <a:solidFill>
-                  <a:schemeClr val="dk1"/>
-                </a:solidFill>
-                <a:latin typeface="Raleway Medium"/>
-              </a:rPr>
-              <a:t>terem</a:t>
-            </a:r>
-            <a:r>
-              <a:rPr lang="en-US" sz="1400" dirty="0">
-                <a:solidFill>
-                  <a:schemeClr val="dk1"/>
-                </a:solidFill>
-                <a:latin typeface="Raleway Medium"/>
-              </a:rPr>
-              <a:t> pesos </a:t>
-            </a:r>
-            <a:r>
-              <a:rPr lang="en-US" sz="1400" dirty="0" err="1">
-                <a:solidFill>
-                  <a:schemeClr val="dk1"/>
-                </a:solidFill>
-                <a:latin typeface="Raleway Medium"/>
-              </a:rPr>
-              <a:t>semelhantes</a:t>
-            </a:r>
-            <a:r>
-              <a:rPr lang="en-US" sz="1400" dirty="0">
-                <a:solidFill>
-                  <a:schemeClr val="dk1"/>
-                </a:solidFill>
-                <a:latin typeface="Raleway Medium"/>
-              </a:rPr>
-              <a:t> </a:t>
-            </a:r>
-            <a:r>
-              <a:rPr lang="en-US" sz="1400" dirty="0" err="1">
-                <a:solidFill>
-                  <a:schemeClr val="dk1"/>
-                </a:solidFill>
-                <a:latin typeface="Raleway Medium"/>
-              </a:rPr>
-              <a:t>na</a:t>
-            </a:r>
-            <a:r>
-              <a:rPr lang="en-US" sz="1400" dirty="0">
-                <a:solidFill>
-                  <a:schemeClr val="dk1"/>
-                </a:solidFill>
-                <a:latin typeface="Raleway Medium"/>
-              </a:rPr>
-              <a:t> </a:t>
-            </a:r>
-            <a:r>
-              <a:rPr lang="en-US" sz="1400" dirty="0" err="1">
-                <a:solidFill>
-                  <a:schemeClr val="dk1"/>
-                </a:solidFill>
-                <a:latin typeface="Raleway Medium"/>
-              </a:rPr>
-              <a:t>classificação</a:t>
-            </a:r>
-            <a:r>
-              <a:rPr lang="en-US" sz="1400" dirty="0">
-                <a:solidFill>
-                  <a:schemeClr val="dk1"/>
-                </a:solidFill>
-                <a:latin typeface="Raleway Medium"/>
-              </a:rPr>
-              <a:t>.</a:t>
+              <a:t>Média das probabilidades (softmax) das inferências de ambos os modelos. O softmax normaliza as saídas, garantindo que os dois modelos tenham pesos equivalentes na classificação final.</a:t>
             </a:r>
             <a:endParaRPr lang="en-US" sz="1400" dirty="0">
               <a:solidFill>
@@ -12641,7 +12297,7 @@
         </p:nvSpPr>
         <p:spPr>
           <a:xfrm>
-            <a:off x="4619414" y="1969737"/>
+            <a:off x="4805547" y="2031112"/>
             <a:ext cx="3462120" cy="3028680"/>
           </a:xfrm>
           <a:prstGeom prst="rect">
@@ -12685,238 +12341,13 @@
               </a:tabLst>
             </a:pPr>
             <a:r>
-              <a:rPr lang="en-US" sz="1400" dirty="0" err="1">
+              <a:rPr lang="pt-BR" sz="1400" dirty="0">
                 <a:solidFill>
                   <a:schemeClr val="dk1"/>
                 </a:solidFill>
                 <a:latin typeface="Raleway Medium"/>
               </a:rPr>
-              <a:t>Além</a:t>
-            </a:r>
-            <a:r>
-              <a:rPr lang="en-US" sz="1400" dirty="0">
-                <a:solidFill>
-                  <a:schemeClr val="dk1"/>
-                </a:solidFill>
-                <a:latin typeface="Raleway Medium"/>
-              </a:rPr>
-              <a:t> da </a:t>
-            </a:r>
-            <a:r>
-              <a:rPr lang="en-US" sz="1400" dirty="0" err="1">
-                <a:solidFill>
-                  <a:schemeClr val="dk1"/>
-                </a:solidFill>
-                <a:latin typeface="Raleway Medium"/>
-              </a:rPr>
-              <a:t>inferência</a:t>
-            </a:r>
-            <a:r>
-              <a:rPr lang="en-US" sz="1400" dirty="0">
-                <a:solidFill>
-                  <a:schemeClr val="dk1"/>
-                </a:solidFill>
-                <a:latin typeface="Raleway Medium"/>
-              </a:rPr>
-              <a:t> </a:t>
-            </a:r>
-            <a:r>
-              <a:rPr lang="en-US" sz="1400" dirty="0" err="1">
-                <a:solidFill>
-                  <a:schemeClr val="dk1"/>
-                </a:solidFill>
-                <a:latin typeface="Raleway Medium"/>
-              </a:rPr>
-              <a:t>padrão</a:t>
-            </a:r>
-            <a:r>
-              <a:rPr lang="en-US" sz="1400" dirty="0">
-                <a:solidFill>
-                  <a:schemeClr val="dk1"/>
-                </a:solidFill>
-                <a:latin typeface="Raleway Medium"/>
-              </a:rPr>
-              <a:t>, </a:t>
-            </a:r>
-            <a:r>
-              <a:rPr lang="en-US" sz="1400" dirty="0" err="1">
-                <a:solidFill>
-                  <a:schemeClr val="dk1"/>
-                </a:solidFill>
-                <a:latin typeface="Raleway Medium"/>
-              </a:rPr>
-              <a:t>desloca</a:t>
-            </a:r>
-            <a:r>
-              <a:rPr lang="en-US" sz="1400" dirty="0">
-                <a:solidFill>
-                  <a:schemeClr val="dk1"/>
-                </a:solidFill>
-                <a:latin typeface="Raleway Medium"/>
-              </a:rPr>
-              <a:t> a </a:t>
-            </a:r>
-            <a:r>
-              <a:rPr lang="en-US" sz="1400" dirty="0" err="1">
-                <a:solidFill>
-                  <a:schemeClr val="dk1"/>
-                </a:solidFill>
-                <a:latin typeface="Raleway Medium"/>
-              </a:rPr>
-              <a:t>imagem</a:t>
-            </a:r>
-            <a:r>
-              <a:rPr lang="en-US" sz="1400" dirty="0">
-                <a:solidFill>
-                  <a:schemeClr val="dk1"/>
-                </a:solidFill>
-                <a:latin typeface="Raleway Medium"/>
-              </a:rPr>
-              <a:t> 1px para </a:t>
-            </a:r>
-            <a:r>
-              <a:rPr lang="en-US" sz="1400" dirty="0" err="1">
-                <a:solidFill>
-                  <a:schemeClr val="dk1"/>
-                </a:solidFill>
-                <a:latin typeface="Raleway Medium"/>
-              </a:rPr>
-              <a:t>todas</a:t>
-            </a:r>
-            <a:r>
-              <a:rPr lang="en-US" sz="1400" dirty="0">
-                <a:solidFill>
-                  <a:schemeClr val="dk1"/>
-                </a:solidFill>
-                <a:latin typeface="Raleway Medium"/>
-              </a:rPr>
-              <a:t> as 4 </a:t>
-            </a:r>
-            <a:r>
-              <a:rPr lang="en-US" sz="1400" dirty="0" err="1">
-                <a:solidFill>
-                  <a:schemeClr val="dk1"/>
-                </a:solidFill>
-                <a:latin typeface="Raleway Medium"/>
-              </a:rPr>
-              <a:t>direções</a:t>
-            </a:r>
-            <a:r>
-              <a:rPr lang="en-US" sz="1400" dirty="0">
-                <a:solidFill>
-                  <a:schemeClr val="dk1"/>
-                </a:solidFill>
-                <a:latin typeface="Raleway Medium"/>
-              </a:rPr>
-              <a:t> e </a:t>
-            </a:r>
-            <a:r>
-              <a:rPr lang="en-US" sz="1400" dirty="0" err="1">
-                <a:solidFill>
-                  <a:schemeClr val="dk1"/>
-                </a:solidFill>
-                <a:latin typeface="Raleway Medium"/>
-              </a:rPr>
-              <a:t>faz</a:t>
-            </a:r>
-            <a:r>
-              <a:rPr lang="en-US" sz="1400" dirty="0">
-                <a:solidFill>
-                  <a:schemeClr val="dk1"/>
-                </a:solidFill>
-                <a:latin typeface="Raleway Medium"/>
-              </a:rPr>
-              <a:t> </a:t>
-            </a:r>
-            <a:r>
-              <a:rPr lang="en-US" sz="1400" dirty="0" err="1">
-                <a:solidFill>
-                  <a:schemeClr val="dk1"/>
-                </a:solidFill>
-                <a:latin typeface="Raleway Medium"/>
-              </a:rPr>
-              <a:t>aferições</a:t>
-            </a:r>
-            <a:r>
-              <a:rPr lang="en-US" sz="1400" dirty="0">
-                <a:solidFill>
-                  <a:schemeClr val="dk1"/>
-                </a:solidFill>
-                <a:latin typeface="Raleway Medium"/>
-              </a:rPr>
-              <a:t> com </a:t>
-            </a:r>
-            <a:r>
-              <a:rPr lang="en-US" sz="1400" dirty="0" err="1">
-                <a:solidFill>
-                  <a:schemeClr val="dk1"/>
-                </a:solidFill>
-                <a:latin typeface="Raleway Medium"/>
-              </a:rPr>
-              <a:t>essas</a:t>
-            </a:r>
-            <a:r>
-              <a:rPr lang="en-US" sz="1400" dirty="0">
-                <a:solidFill>
-                  <a:schemeClr val="dk1"/>
-                </a:solidFill>
-                <a:latin typeface="Raleway Medium"/>
-              </a:rPr>
-              <a:t> imagens, </a:t>
-            </a:r>
-            <a:r>
-              <a:rPr lang="en-US" sz="1400" dirty="0" err="1">
-                <a:solidFill>
-                  <a:schemeClr val="dk1"/>
-                </a:solidFill>
-                <a:latin typeface="Raleway Medium"/>
-              </a:rPr>
-              <a:t>retorna</a:t>
-            </a:r>
-            <a:r>
-              <a:rPr lang="en-US" sz="1400" dirty="0">
-                <a:solidFill>
-                  <a:schemeClr val="dk1"/>
-                </a:solidFill>
-                <a:latin typeface="Raleway Medium"/>
-              </a:rPr>
-              <a:t> </a:t>
-            </a:r>
-            <a:r>
-              <a:rPr lang="en-US" sz="1400" dirty="0" err="1">
-                <a:solidFill>
-                  <a:schemeClr val="dk1"/>
-                </a:solidFill>
-                <a:latin typeface="Raleway Medium"/>
-              </a:rPr>
-              <a:t>uma</a:t>
-            </a:r>
-            <a:r>
-              <a:rPr lang="en-US" sz="1400" dirty="0">
-                <a:solidFill>
-                  <a:schemeClr val="dk1"/>
-                </a:solidFill>
-                <a:latin typeface="Raleway Medium"/>
-              </a:rPr>
-              <a:t> media SoftMax das 5 </a:t>
-            </a:r>
-            <a:r>
-              <a:rPr lang="en-US" sz="1400" dirty="0" err="1">
-                <a:solidFill>
-                  <a:schemeClr val="dk1"/>
-                </a:solidFill>
-                <a:latin typeface="Raleway Medium"/>
-              </a:rPr>
-              <a:t>inferências</a:t>
-            </a:r>
-            <a:r>
-              <a:rPr lang="en-US" sz="1400" dirty="0">
-                <a:solidFill>
-                  <a:schemeClr val="dk1"/>
-                </a:solidFill>
-                <a:latin typeface="Raleway Medium"/>
-              </a:rPr>
-              <a:t>.</a:t>
+              <a:t>Além da inferência padrão, desloca a imagem em 1px nas 4 direções e realiza inferências adicionais. Retorna a média das probabilidades (softmax) das 5 predições.</a:t>
             </a:r>
             <a:endParaRPr lang="en-US" sz="1400" dirty="0">
               <a:solidFill>
@@ -12971,7 +12402,7 @@
         </p:nvSpPr>
         <p:spPr>
           <a:xfrm>
-            <a:off x="1518927" y="3629758"/>
+            <a:off x="1507923" y="3820031"/>
             <a:ext cx="1826539" cy="1428480"/>
           </a:xfrm>
           <a:prstGeom prst="rect">
@@ -13044,7 +12475,7 @@
         </p:nvSpPr>
         <p:spPr>
           <a:xfrm>
-            <a:off x="5857752" y="3629758"/>
+            <a:off x="5623337" y="3820031"/>
             <a:ext cx="1826539" cy="1428480"/>
           </a:xfrm>
           <a:prstGeom prst="rect">
@@ -13097,6 +12528,89 @@
               <a:highlight>
                 <a:srgbClr val="008000"/>
               </a:highlight>
+              <a:uFillTx/>
+              <a:latin typeface="OpenSymbol"/>
+            </a:endParaRPr>
+          </a:p>
+        </p:txBody>
+      </p:sp>
+      <p:sp>
+        <p:nvSpPr>
+          <p:cNvPr id="3" name="Retângulo 2">
+            <a:extLst>
+              <a:ext uri="{FF2B5EF4-FFF2-40B4-BE49-F238E27FC236}">
+                <a16:creationId xmlns:a16="http://schemas.microsoft.com/office/drawing/2014/main" id="{AF643C7B-D95D-69EF-9D1C-5D15A9DDD513}"/>
+              </a:ext>
+            </a:extLst>
+          </p:cNvPr>
+          <p:cNvSpPr/>
+          <p:nvPr/>
+        </p:nvSpPr>
+        <p:spPr>
+          <a:xfrm>
+            <a:off x="4915133" y="1074492"/>
+            <a:ext cx="3251200" cy="1428480"/>
+          </a:xfrm>
+          <a:prstGeom prst="rect">
+            <a:avLst/>
+          </a:prstGeom>
+          <a:noFill/>
+          <a:ln w="0">
+            <a:noFill/>
+          </a:ln>
+        </p:spPr>
+        <p:style>
+          <a:lnRef idx="0">
+            <a:scrgbClr r="0" g="0" b="0"/>
+          </a:lnRef>
+          <a:fillRef idx="0">
+            <a:scrgbClr r="0" g="0" b="0"/>
+          </a:fillRef>
+          <a:effectRef idx="0">
+            <a:scrgbClr r="0" g="0" b="0"/>
+          </a:effectRef>
+          <a:fontRef idx="minor"/>
+        </p:style>
+        <p:txBody>
+          <a:bodyPr anchor="ctr">
+            <a:normAutofit/>
+          </a:bodyPr>
+          <a:lstStyle/>
+          <a:p>
+            <a:pPr defTabSz="914400">
+              <a:lnSpc>
+                <a:spcPct val="100000"/>
+              </a:lnSpc>
+              <a:tabLst>
+                <a:tab pos="0" algn="l"/>
+              </a:tabLst>
+            </a:pPr>
+            <a:r>
+              <a:rPr lang="en-US" sz="2400" b="0" u="none" strike="noStrike" dirty="0">
+                <a:effectLst/>
+                <a:uFillTx/>
+                <a:latin typeface="Bebas Neue"/>
+              </a:rPr>
+              <a:t>Test-time augmentation (</a:t>
+            </a:r>
+            <a:r>
+              <a:rPr lang="en-US" sz="2400" b="0" u="none" strike="noStrike" dirty="0" err="1">
+                <a:effectLst/>
+                <a:uFillTx/>
+                <a:latin typeface="Bebas Neue"/>
+              </a:rPr>
+              <a:t>tta</a:t>
+            </a:r>
+            <a:r>
+              <a:rPr lang="en-US" sz="2400" b="0" u="none" strike="noStrike" dirty="0">
+                <a:effectLst/>
+                <a:uFillTx/>
+                <a:latin typeface="Bebas Neue"/>
+              </a:rPr>
+              <a:t>)</a:t>
+            </a:r>
+            <a:endParaRPr lang="en-US" sz="2400" b="0" u="none" strike="noStrike" dirty="0">
+              <a:effectLst/>
               <a:uFillTx/>
               <a:latin typeface="OpenSymbol"/>
             </a:endParaRPr>
@@ -13886,7 +13400,7 @@
         </p:nvSpPr>
         <p:spPr>
           <a:xfrm>
-            <a:off x="3217779" y="313299"/>
+            <a:off x="3307157" y="313299"/>
             <a:ext cx="5133600" cy="1037880"/>
           </a:xfrm>
           <a:prstGeom prst="rect">
@@ -14777,79 +14291,6 @@
       </p:grpSpPr>
       <p:sp>
         <p:nvSpPr>
-          <p:cNvPr id="14" name="Retângulo 13">
-            <a:extLst>
-              <a:ext uri="{FF2B5EF4-FFF2-40B4-BE49-F238E27FC236}">
-                <a16:creationId xmlns:a16="http://schemas.microsoft.com/office/drawing/2014/main" id="{E36D169F-4575-DD71-3014-4AF6742C2671}"/>
-              </a:ext>
-            </a:extLst>
-          </p:cNvPr>
-          <p:cNvSpPr/>
-          <p:nvPr/>
-        </p:nvSpPr>
-        <p:spPr>
-          <a:xfrm>
-            <a:off x="691026" y="453246"/>
-            <a:ext cx="2285640" cy="1200329"/>
-          </a:xfrm>
-          <a:prstGeom prst="rect">
-            <a:avLst/>
-          </a:prstGeom>
-          <a:noFill/>
-          <a:ln w="0">
-            <a:noFill/>
-          </a:ln>
-        </p:spPr>
-        <p:style>
-          <a:lnRef idx="0">
-            <a:scrgbClr r="0" g="0" b="0"/>
-          </a:lnRef>
-          <a:fillRef idx="0">
-            <a:scrgbClr r="0" g="0" b="0"/>
-          </a:fillRef>
-          <a:effectRef idx="0">
-            <a:scrgbClr r="0" g="0" b="0"/>
-          </a:effectRef>
-          <a:fontRef idx="minor"/>
-        </p:style>
-        <p:txBody>
-          <a:bodyPr anchor="t">
-            <a:spAutoFit/>
-          </a:bodyPr>
-          <a:lstStyle/>
-          <a:p>
-            <a:pPr defTabSz="914400">
-              <a:lnSpc>
-                <a:spcPct val="100000"/>
-              </a:lnSpc>
-              <a:tabLst>
-                <a:tab pos="0" algn="l"/>
-              </a:tabLst>
-            </a:pPr>
-            <a:r>
-              <a:rPr lang="en-US" sz="7200" b="1" u="none" strike="noStrike" dirty="0">
-                <a:solidFill>
-                  <a:schemeClr val="accent1"/>
-                </a:solidFill>
-                <a:effectLst/>
-                <a:uFillTx/>
-                <a:latin typeface="Bebas Neue" panose="020B0606020202050201" pitchFamily="34" charset="0"/>
-              </a:rPr>
-              <a:t>01</a:t>
-            </a:r>
-            <a:endParaRPr lang="en-US" sz="7200" b="0" u="none" strike="noStrike" dirty="0">
-              <a:solidFill>
-                <a:srgbClr val="FFFFFF"/>
-              </a:solidFill>
-              <a:effectLst/>
-              <a:uFillTx/>
-              <a:latin typeface="Bebas Neue" panose="020B0606020202050201" pitchFamily="34" charset="0"/>
-            </a:endParaRPr>
-          </a:p>
-        </p:txBody>
-      </p:sp>
-      <p:sp>
-        <p:nvSpPr>
           <p:cNvPr id="15" name="Retângulo 14">
             <a:extLst>
               <a:ext uri="{FF2B5EF4-FFF2-40B4-BE49-F238E27FC236}">
@@ -14862,7 +14303,7 @@
         </p:nvSpPr>
         <p:spPr>
           <a:xfrm>
-            <a:off x="1476770" y="139234"/>
+            <a:off x="3345214" y="61442"/>
             <a:ext cx="3238200" cy="1428480"/>
           </a:xfrm>
           <a:prstGeom prst="rect">
@@ -14946,7 +14387,7 @@
         </p:nvSpPr>
         <p:spPr>
           <a:xfrm>
-            <a:off x="1951043" y="689028"/>
+            <a:off x="1742441" y="225095"/>
             <a:ext cx="1276320" cy="1428480"/>
           </a:xfrm>
           <a:prstGeom prst="rect">
@@ -15082,8 +14523,8 @@
         </p:nvCxnSpPr>
         <p:spPr>
           <a:xfrm>
-            <a:off x="4457042" y="602827"/>
-            <a:ext cx="0" cy="4627264"/>
+            <a:off x="4457042" y="1134406"/>
+            <a:ext cx="0" cy="4095685"/>
           </a:xfrm>
           <a:prstGeom prst="straightConnector1">
             <a:avLst/>
@@ -15112,7 +14553,7 @@
         </p:nvSpPr>
         <p:spPr>
           <a:xfrm>
-            <a:off x="974141" y="1567714"/>
+            <a:off x="715446" y="1067102"/>
             <a:ext cx="3462120" cy="3028680"/>
           </a:xfrm>
           <a:prstGeom prst="rect">
@@ -15566,8 +15007,8 @@
         </p:blipFill>
         <p:spPr>
           <a:xfrm>
-            <a:off x="1280316" y="2641657"/>
-            <a:ext cx="2617773" cy="2440401"/>
+            <a:off x="1101644" y="2495582"/>
+            <a:ext cx="2720452" cy="2536123"/>
           </a:xfrm>
           <a:prstGeom prst="rect">
             <a:avLst/>

--- a/Apresentação.pptx
+++ b/Apresentação.pptx
@@ -14186,7 +14186,7 @@
                 </a:solidFill>
                 <a:latin typeface="Raleway Medium"/>
               </a:rPr>
-              <a:t> (11.280 </a:t>
+              <a:t> /11.280 </a:t>
             </a:r>
             <a:r>
               <a:rPr lang="en-US" sz="1400" dirty="0" err="1">
@@ -14197,16 +14197,34 @@
               </a:rPr>
               <a:t>Validação</a:t>
             </a:r>
-            <a:r>
-              <a:rPr lang="en-US" sz="1400" dirty="0">
+            <a:endParaRPr lang="en-US" sz="1400" dirty="0">
+              <a:solidFill>
+                <a:schemeClr val="dk1"/>
+              </a:solidFill>
+              <a:latin typeface="Raleway Medium"/>
+            </a:endParaRPr>
+          </a:p>
+          <a:p>
+            <a:pPr marL="285750" indent="-285750" algn="just">
+              <a:lnSpc>
+                <a:spcPct val="150000"/>
+              </a:lnSpc>
+              <a:buFont typeface="Arial" panose="020B0604020202020204" pitchFamily="34" charset="0"/>
+              <a:buChar char="•"/>
+              <a:tabLst>
+                <a:tab pos="0" algn="l"/>
+              </a:tabLst>
+            </a:pPr>
+            <a:r>
+              <a:rPr lang="en-US" sz="1400" b="1" dirty="0">
                 <a:solidFill>
                   <a:schemeClr val="dk1"/>
                 </a:solidFill>
                 <a:latin typeface="Raleway Medium"/>
               </a:rPr>
-              <a:t>)/18.800 Teste</a:t>
-            </a:r>
-            <a:endParaRPr lang="en-US" sz="1400" b="0" u="none" strike="noStrike" dirty="0">
+              <a:t>18.800 para Teste</a:t>
+            </a:r>
+            <a:endParaRPr lang="en-US" sz="1400" b="1" u="none" strike="noStrike" dirty="0">
               <a:solidFill>
                 <a:srgbClr val="FFFFFF"/>
               </a:solidFill>
@@ -14245,7 +14263,7 @@
         </p:blipFill>
         <p:spPr>
           <a:xfrm>
-            <a:off x="705126" y="2906088"/>
+            <a:off x="705126" y="3021235"/>
             <a:ext cx="7733748" cy="1848785"/>
           </a:xfrm>
           <a:prstGeom prst="rect">
